--- a/Foundation_F5/Workshop/F5-W01_Apply_Workshop_L01-L02_My_Food_Diary_Interview.pptx
+++ b/Foundation_F5/Workshop/F5-W01_Apply_Workshop_L01-L02_My_Food_Diary_Interview.pptx
@@ -7436,7 +7436,7 @@
                 <a:latin typeface="Calibri" pitchFamily="34" charset="0"/>
                 <a:cs typeface="Amiri" pitchFamily="2" charset="-78"/>
               </a:rPr>
-              <a:t>Odd numbers come from F5-L01, even numbers from F5-L02. Core: a full sentence from the starter. Develop: add the “more” part. Stretch: link two answers with </a:t>
+              <a:t>Odd numbers come from F5-L01, even numbers from F5-L02. Core: a full sentence from the starter. Develop: add the “more” part. Stretch: link two answers with ‏</a:t>
             </a:r>
             <a:pPr algn="l" indent="0" marL="0">
               <a:buNone/>
@@ -7463,7 +7463,7 @@
                 <a:latin typeface="Calibri" pitchFamily="34" charset="0"/>
                 <a:cs typeface="Amiri" pitchFamily="2" charset="-78"/>
               </a:rPr>
-              <a:t>, </a:t>
+              <a:t>‏, ‏</a:t>
             </a:r>
             <a:pPr algn="l" indent="0" marL="0">
               <a:buNone/>
@@ -7490,7 +7490,7 @@
                 <a:latin typeface="Calibri" pitchFamily="34" charset="0"/>
                 <a:cs typeface="Amiri" pitchFamily="2" charset="-78"/>
               </a:rPr>
-              <a:t> or </a:t>
+              <a:t>‏ or ‏</a:t>
             </a:r>
             <a:pPr algn="l" indent="0" marL="0">
               <a:buNone/>
@@ -7517,7 +7517,7 @@
                 <a:latin typeface="Calibri" pitchFamily="34" charset="0"/>
                 <a:cs typeface="Amiri" pitchFamily="2" charset="-78"/>
               </a:rPr>
-              <a:t>. Swap after each question.</a:t>
+              <a:t>‏. Swap after each question.</a:t>
             </a:r>
             <a:endParaRPr lang="en-US" sz="1100" dirty="0"/>
           </a:p>
@@ -10977,7 +10977,7 @@
                 <a:latin typeface="Calibri" pitchFamily="34" charset="0"/>
                 <a:cs typeface="Amiri" pitchFamily="2" charset="-78"/>
               </a:rPr>
-              <a:t>Add a snack, a time and </a:t>
+              <a:t>Add a snack, a time and ‏</a:t>
             </a:r>
             <a:pPr algn="l" indent="0" marL="0">
               <a:buNone/>
@@ -11004,7 +11004,7 @@
                 <a:latin typeface="Calibri" pitchFamily="34" charset="0"/>
                 <a:cs typeface="Amiri" pitchFamily="2" charset="-78"/>
               </a:rPr>
-              <a:t> …</a:t>
+              <a:t> …‏</a:t>
             </a:r>
             <a:endParaRPr lang="en-US" sz="1150" dirty="0"/>
           </a:p>
@@ -17365,7 +17365,7 @@
                 <a:latin typeface="Calibri" pitchFamily="34" charset="0"/>
                 <a:cs typeface="Amiri" pitchFamily="2" charset="-78"/>
               </a:rPr>
-              <a:t>I eat = </a:t>
+              <a:t>I eat = ‏</a:t>
             </a:r>
             <a:pPr algn="l" indent="0" marL="0">
               <a:buNone/>
@@ -17392,7 +17392,7 @@
                 <a:latin typeface="Calibri" pitchFamily="34" charset="0"/>
                 <a:cs typeface="Amiri" pitchFamily="2" charset="-78"/>
               </a:rPr>
-              <a:t>.</a:t>
+              <a:t>‏.</a:t>
             </a:r>
             <a:endParaRPr lang="en-US" sz="1150" dirty="0"/>
           </a:p>
@@ -17596,6 +17596,19 @@
               <a:buNone/>
             </a:pPr>
             <a:r>
+              <a:rPr lang="en-US" sz="1150" b="1" dirty="0">
+                <a:solidFill>
+                  <a:srgbClr val="1B3B6F"/>
+                </a:solidFill>
+                <a:latin typeface="Calibri" pitchFamily="34" charset="0"/>
+                <a:cs typeface="Amiri" pitchFamily="2" charset="-78"/>
+              </a:rPr>
+              <a:t>‏</a:t>
+            </a:r>
+            <a:pPr algn="l" indent="0" marL="0">
+              <a:buNone/>
+            </a:pPr>
+            <a:r>
               <a:rPr lang="ar-SA" altLang="en-US" sz="1500" b="1" dirty="0">
                 <a:solidFill>
                   <a:srgbClr val="1B3B6F"/>
@@ -17617,7 +17630,7 @@
                 <a:latin typeface="Calibri" pitchFamily="34" charset="0"/>
                 <a:cs typeface="Amiri" pitchFamily="2" charset="-78"/>
               </a:rPr>
-              <a:t> + genitive: </a:t>
+              <a:t>‏ + genitive: ‏</a:t>
             </a:r>
             <a:pPr algn="l" indent="0" marL="0">
               <a:buNone/>
@@ -17644,7 +17657,7 @@
                 <a:latin typeface="Calibri" pitchFamily="34" charset="0"/>
                 <a:cs typeface="Amiri" pitchFamily="2" charset="-78"/>
               </a:rPr>
-              <a:t>.</a:t>
+              <a:t>‏.</a:t>
             </a:r>
             <a:endParaRPr lang="en-US" sz="1150" dirty="0"/>
           </a:p>
@@ -17855,7 +17868,7 @@
                 <a:latin typeface="Calibri" pitchFamily="34" charset="0"/>
                 <a:cs typeface="Amiri" pitchFamily="2" charset="-78"/>
               </a:rPr>
-              <a:t>With a present verb use </a:t>
+              <a:t>With a present verb use ‏</a:t>
             </a:r>
             <a:pPr algn="l" indent="0" marL="0">
               <a:buNone/>
@@ -17882,7 +17895,7 @@
                 <a:latin typeface="Calibri" pitchFamily="34" charset="0"/>
                 <a:cs typeface="Amiri" pitchFamily="2" charset="-78"/>
               </a:rPr>
-              <a:t>.</a:t>
+              <a:t>‏.</a:t>
             </a:r>
             <a:endParaRPr lang="en-US" sz="1150" dirty="0"/>
           </a:p>
@@ -20082,7 +20095,7 @@
                 <a:latin typeface="Calibri" pitchFamily="34" charset="0"/>
                 <a:cs typeface="Amiri" pitchFamily="2" charset="-78"/>
               </a:rPr>
-              <a:t>☐  At least one </a:t>
+              <a:t>☐  At least one ‏</a:t>
             </a:r>
             <a:pPr algn="l" indent="0" marL="0">
               <a:buNone/>
@@ -20109,7 +20122,7 @@
                 <a:latin typeface="Calibri" pitchFamily="34" charset="0"/>
                 <a:cs typeface="Amiri" pitchFamily="2" charset="-78"/>
               </a:rPr>
-              <a:t> and one </a:t>
+              <a:t>‏ and one ‏</a:t>
             </a:r>
             <a:pPr algn="l" indent="0" marL="0">
               <a:buNone/>
@@ -20136,7 +20149,7 @@
                 <a:latin typeface="Calibri" pitchFamily="34" charset="0"/>
                 <a:cs typeface="Amiri" pitchFamily="2" charset="-78"/>
               </a:rPr>
-              <a:t> (Develop).</a:t>
+              <a:t>‏ (Develop).</a:t>
             </a:r>
             <a:endParaRPr lang="en-US" sz="1200" dirty="0"/>
           </a:p>
@@ -23460,7 +23473,7 @@
                 <a:latin typeface="Calibri" pitchFamily="34" charset="0"/>
                 <a:cs typeface="Amiri" pitchFamily="2" charset="-78"/>
               </a:rPr>
-              <a:t>use </a:t>
+              <a:t>use ‏</a:t>
             </a:r>
             <a:pPr algn="l" indent="0" marL="0">
               <a:buNone/>
@@ -23487,7 +23500,7 @@
                 <a:latin typeface="Calibri" pitchFamily="34" charset="0"/>
                 <a:cs typeface="Amiri" pitchFamily="2" charset="-78"/>
               </a:rPr>
-              <a:t> with the food as object (-a)?</a:t>
+              <a:t>‏ with the food as object (-a)?</a:t>
             </a:r>
             <a:endParaRPr lang="en-US" sz="1100" dirty="0"/>
           </a:p>
@@ -23870,7 +23883,7 @@
                 <a:latin typeface="Calibri" pitchFamily="34" charset="0"/>
                 <a:cs typeface="Amiri" pitchFamily="2" charset="-78"/>
               </a:rPr>
-              <a:t>use linking words (</a:t>
+              <a:t>use linking words (‏</a:t>
             </a:r>
             <a:pPr algn="l" indent="0" marL="0">
               <a:buNone/>
@@ -23978,7 +23991,7 @@
                 <a:latin typeface="Calibri" pitchFamily="34" charset="0"/>
                 <a:cs typeface="Amiri" pitchFamily="2" charset="-78"/>
               </a:rPr>
-              <a:t>)?</a:t>
+              <a:t>‏)?</a:t>
             </a:r>
             <a:endParaRPr lang="en-US" sz="1100" dirty="0"/>
           </a:p>
@@ -27924,7 +27937,7 @@
                 <a:latin typeface="Calibri" pitchFamily="34" charset="0"/>
                 <a:cs typeface="Amiri" pitchFamily="2" charset="-78"/>
               </a:rPr>
-              <a:t>I added reasons (</a:t>
+              <a:t>I added reasons (‏</a:t>
             </a:r>
             <a:pPr algn="l" indent="0" marL="0">
               <a:buNone/>
@@ -27951,7 +27964,7 @@
                 <a:latin typeface="Calibri" pitchFamily="34" charset="0"/>
                 <a:cs typeface="Amiri" pitchFamily="2" charset="-78"/>
               </a:rPr>
-              <a:t>) and extra details without frames.</a:t>
+              <a:t>‏) and extra details without frames.</a:t>
             </a:r>
             <a:endParaRPr lang="en-US" sz="1300" dirty="0"/>
           </a:p>
@@ -32079,7 +32092,7 @@
                 <a:latin typeface="Calibri" pitchFamily="34" charset="0"/>
                 <a:cs typeface="Amiri" pitchFamily="2" charset="-78"/>
               </a:rPr>
-              <a:t>☐  Add a reason (</a:t>
+              <a:t>☐  Add a reason (‏</a:t>
             </a:r>
             <a:pPr algn="l" indent="0" marL="0">
               <a:buNone/>
@@ -32106,7 +32119,7 @@
                 <a:latin typeface="Calibri" pitchFamily="34" charset="0"/>
                 <a:cs typeface="Amiri" pitchFamily="2" charset="-78"/>
               </a:rPr>
-              <a:t>) and an extra detail to every point.</a:t>
+              <a:t>‏) and an extra detail to every point.</a:t>
             </a:r>
             <a:endParaRPr lang="en-US" sz="1300" dirty="0"/>
           </a:p>
@@ -33627,7 +33640,7 @@
                 <a:latin typeface="Calibri" pitchFamily="34" charset="0"/>
                 <a:cs typeface="Amiri" pitchFamily="2" charset="-78"/>
               </a:rPr>
-              <a:t>Join a word from each lesson in one sentence with </a:t>
+              <a:t>Join a word from each lesson in one sentence with ‏</a:t>
             </a:r>
             <a:pPr algn="l" indent="0" marL="0">
               <a:buNone/>
@@ -33654,7 +33667,7 @@
                 <a:latin typeface="Calibri" pitchFamily="34" charset="0"/>
                 <a:cs typeface="Amiri" pitchFamily="2" charset="-78"/>
               </a:rPr>
-              <a:t> or </a:t>
+              <a:t>‏ or ‏</a:t>
             </a:r>
             <a:pPr algn="l" indent="0" marL="0">
               <a:buNone/>
@@ -33681,7 +33694,7 @@
                 <a:latin typeface="Calibri" pitchFamily="34" charset="0"/>
                 <a:cs typeface="Amiri" pitchFamily="2" charset="-78"/>
               </a:rPr>
-              <a:t>.</a:t>
+              <a:t>‏.</a:t>
             </a:r>
             <a:endParaRPr lang="en-US" sz="1150" dirty="0"/>
           </a:p>
